--- a/MBR_VersionB_Story.pptx
+++ b/MBR_VersionB_Story.pptx
@@ -1025,6 +1025,10 @@
             <a:prstDash val="solid"/>
           </a:ln>
         </p:spPr>
+        <p:txBody>
+          <a:bodyPr/>
+          <a:p/>
+        </p:txBody>
       </p:sp>
       <p:sp>
         <p:nvSpPr>
@@ -1087,6 +1091,10 @@
             <a:prstDash val="solid"/>
           </a:ln>
         </p:spPr>
+        <p:txBody>
+          <a:bodyPr/>
+          <a:p/>
+        </p:txBody>
       </p:sp>
       <p:sp>
         <p:nvSpPr>
@@ -5636,6 +5644,10 @@
             <a:prstDash val="solid"/>
           </a:ln>
         </p:spPr>
+        <p:txBody>
+          <a:bodyPr/>
+          <a:p/>
+        </p:txBody>
       </p:sp>
       <p:sp>
         <p:nvSpPr>
@@ -5659,6 +5671,10 @@
             <a:prstDash val="solid"/>
           </a:ln>
         </p:spPr>
+        <p:txBody>
+          <a:bodyPr/>
+          <a:p/>
+        </p:txBody>
       </p:sp>
       <p:sp>
         <p:nvSpPr>
@@ -5721,6 +5737,10 @@
             <a:prstDash val="solid"/>
           </a:ln>
         </p:spPr>
+        <p:txBody>
+          <a:bodyPr/>
+          <a:p/>
+        </p:txBody>
       </p:sp>
       <p:sp>
         <p:nvSpPr>
@@ -5783,6 +5803,10 @@
             <a:prstDash val="solid"/>
           </a:ln>
         </p:spPr>
+        <p:txBody>
+          <a:bodyPr/>
+          <a:p/>
+        </p:txBody>
       </p:sp>
       <p:sp>
         <p:nvSpPr>
@@ -5806,6 +5830,10 @@
             <a:prstDash val="solid"/>
           </a:ln>
         </p:spPr>
+        <p:txBody>
+          <a:bodyPr/>
+          <a:p/>
+        </p:txBody>
       </p:sp>
       <p:sp>
         <p:nvSpPr>
@@ -8052,246 +8080,6 @@
       </p:sp>
       <p:sp>
         <p:nvSpPr>
-          <p:cNvPr id="23" name="Text 18"/>
-          <p:cNvSpPr/>
-          <p:nvPr/>
-        </p:nvSpPr>
-        <p:spPr>
-          <a:xfrm>
-            <a:off x="640080" y="4928616"/>
-            <a:ext cx="5120640" cy="164592"/>
-          </a:xfrm>
-          <a:prstGeom prst="rect">
-            <a:avLst/>
-          </a:prstGeom>
-          <a:noFill/>
-          <a:ln/>
-        </p:spPr>
-        <p:txBody>
-          <a:bodyPr wrap="square" rtlCol="0" anchor="ctr"/>
-          <a:lstStyle/>
-          <a:p>
-            <a:pPr indent="0" marL="0">
-              <a:buNone/>
-            </a:pPr>
-            <a:r>
-              <a:rPr lang="en-US" sz="800" dirty="0">
-                <a:solidFill>
-                  <a:srgbClr val="000000"/>
-                </a:solidFill>
-                <a:latin typeface="Arial" pitchFamily="34" charset="0"/>
-                <a:ea typeface="Arial" pitchFamily="34" charset="-122"/>
-                <a:cs typeface="Arial" pitchFamily="34" charset="-120"/>
-              </a:rPr>
-              <a:t>▪  Urban: 93 top-10 pending, 10.6D avg delay</a:t>
-            </a:r>
-            <a:endParaRPr lang="en-US" sz="800" dirty="0"/>
-          </a:p>
-        </p:txBody>
-      </p:sp>
-      <p:sp>
-        <p:nvSpPr>
-          <p:cNvPr id="24" name="Text 19"/>
-          <p:cNvSpPr/>
-          <p:nvPr/>
-        </p:nvSpPr>
-        <p:spPr>
-          <a:xfrm>
-            <a:off x="640080" y="5111496"/>
-            <a:ext cx="5120640" cy="164592"/>
-          </a:xfrm>
-          <a:prstGeom prst="rect">
-            <a:avLst/>
-          </a:prstGeom>
-          <a:noFill/>
-          <a:ln/>
-        </p:spPr>
-        <p:txBody>
-          <a:bodyPr wrap="square" rtlCol="0" anchor="ctr"/>
-          <a:lstStyle/>
-          <a:p>
-            <a:pPr indent="0" marL="0">
-              <a:buNone/>
-            </a:pPr>
-            <a:r>
-              <a:rPr lang="en-US" sz="800" dirty="0">
-                <a:solidFill>
-                  <a:srgbClr val="000000"/>
-                </a:solidFill>
-                <a:latin typeface="Arial" pitchFamily="34" charset="0"/>
-                <a:ea typeface="Arial" pitchFamily="34" charset="-122"/>
-                <a:cs typeface="Arial" pitchFamily="34" charset="-120"/>
-              </a:rPr>
-              <a:t>▪  Rural: 53 top-10 pending, 17.4D avg delay</a:t>
-            </a:r>
-            <a:endParaRPr lang="en-US" sz="800" dirty="0"/>
-          </a:p>
-        </p:txBody>
-      </p:sp>
-      <p:sp>
-        <p:nvSpPr>
-          <p:cNvPr id="25" name="Text 20"/>
-          <p:cNvSpPr/>
-          <p:nvPr/>
-        </p:nvSpPr>
-        <p:spPr>
-          <a:xfrm>
-            <a:off x="640080" y="5294376"/>
-            <a:ext cx="5120640" cy="164592"/>
-          </a:xfrm>
-          <a:prstGeom prst="rect">
-            <a:avLst/>
-          </a:prstGeom>
-          <a:noFill/>
-          <a:ln/>
-        </p:spPr>
-        <p:txBody>
-          <a:bodyPr wrap="square" rtlCol="0" anchor="ctr"/>
-          <a:lstStyle/>
-          <a:p>
-            <a:pPr indent="0" marL="0">
-              <a:buNone/>
-            </a:pPr>
-            <a:r>
-              <a:rPr lang="en-US" sz="800" dirty="0">
-                <a:solidFill>
-                  <a:srgbClr val="000000"/>
-                </a:solidFill>
-                <a:latin typeface="Arial" pitchFamily="34" charset="0"/>
-                <a:ea typeface="Arial" pitchFamily="34" charset="-122"/>
-                <a:cs typeface="Arial" pitchFamily="34" charset="-120"/>
-              </a:rPr>
-              <a:t>▪  </a:t>
-            </a:r>
-            <a:pPr indent="0" marL="0">
-              <a:buNone/>
-            </a:pPr>
-            <a:r>
-              <a:rPr lang="en-US" sz="800" dirty="0">
-                <a:solidFill>
-                  <a:srgbClr val="000000"/>
-                </a:solidFill>
-                <a:latin typeface="Arial" pitchFamily="34" charset="0"/>
-                <a:ea typeface="Arial" pitchFamily="34" charset="-122"/>
-                <a:cs typeface="Arial" pitchFamily="34" charset="-120"/>
-              </a:rPr>
-              <a:t>Appliance Medic: </a:t>
-            </a:r>
-            <a:pPr indent="0" marL="0">
-              <a:buNone/>
-            </a:pPr>
-            <a:r>
-              <a:rPr lang="en-US" sz="800" b="1" dirty="0">
-                <a:solidFill>
-                  <a:srgbClr val="CC0000"/>
-                </a:solidFill>
-                <a:latin typeface="Arial" pitchFamily="34" charset="0"/>
-                <a:ea typeface="Arial" pitchFamily="34" charset="-122"/>
-                <a:cs typeface="Arial" pitchFamily="34" charset="-120"/>
-              </a:rPr>
-              <a:t>59.8D</a:t>
-            </a:r>
-            <a:pPr indent="0" marL="0">
-              <a:buNone/>
-            </a:pPr>
-            <a:r>
-              <a:rPr lang="en-US" sz="800" dirty="0">
-                <a:solidFill>
-                  <a:srgbClr val="000000"/>
-                </a:solidFill>
-                <a:latin typeface="Arial" pitchFamily="34" charset="0"/>
-                <a:ea typeface="Arial" pitchFamily="34" charset="-122"/>
-                <a:cs typeface="Arial" pitchFamily="34" charset="-120"/>
-              </a:rPr>
-              <a:t> avg delay</a:t>
-            </a:r>
-            <a:endParaRPr lang="en-US" sz="800" dirty="0"/>
-          </a:p>
-        </p:txBody>
-      </p:sp>
-      <p:sp>
-        <p:nvSpPr>
-          <p:cNvPr id="26" name="Text 21"/>
-          <p:cNvSpPr/>
-          <p:nvPr/>
-        </p:nvSpPr>
-        <p:spPr>
-          <a:xfrm>
-            <a:off x="640080" y="5477256"/>
-            <a:ext cx="5120640" cy="164592"/>
-          </a:xfrm>
-          <a:prstGeom prst="rect">
-            <a:avLst/>
-          </a:prstGeom>
-          <a:noFill/>
-          <a:ln/>
-        </p:spPr>
-        <p:txBody>
-          <a:bodyPr wrap="square" rtlCol="0" anchor="ctr"/>
-          <a:lstStyle/>
-          <a:p>
-            <a:pPr indent="0" marL="0">
-              <a:buNone/>
-            </a:pPr>
-            <a:r>
-              <a:rPr lang="en-US" sz="800" dirty="0">
-                <a:solidFill>
-                  <a:srgbClr val="000000"/>
-                </a:solidFill>
-                <a:latin typeface="Arial" pitchFamily="34" charset="0"/>
-                <a:ea typeface="Arial" pitchFamily="34" charset="-122"/>
-                <a:cs typeface="Arial" pitchFamily="34" charset="-120"/>
-              </a:rPr>
-              <a:t>▪  </a:t>
-            </a:r>
-            <a:pPr indent="0" marL="0">
-              <a:buNone/>
-            </a:pPr>
-            <a:r>
-              <a:rPr lang="en-US" sz="800" dirty="0">
-                <a:solidFill>
-                  <a:srgbClr val="000000"/>
-                </a:solidFill>
-                <a:latin typeface="Arial" pitchFamily="34" charset="0"/>
-                <a:ea typeface="Arial" pitchFamily="34" charset="-122"/>
-                <a:cs typeface="Arial" pitchFamily="34" charset="-120"/>
-              </a:rPr>
-              <a:t>TV Specialty Shop: </a:t>
-            </a:r>
-            <a:pPr indent="0" marL="0">
-              <a:buNone/>
-            </a:pPr>
-            <a:r>
-              <a:rPr lang="en-US" sz="800" b="1" dirty="0">
-                <a:solidFill>
-                  <a:srgbClr val="CC0000"/>
-                </a:solidFill>
-                <a:latin typeface="Arial" pitchFamily="34" charset="0"/>
-                <a:ea typeface="Arial" pitchFamily="34" charset="-122"/>
-                <a:cs typeface="Arial" pitchFamily="34" charset="-120"/>
-              </a:rPr>
-              <a:t>24.8D</a:t>
-            </a:r>
-            <a:pPr indent="0" marL="0">
-              <a:buNone/>
-            </a:pPr>
-            <a:r>
-              <a:rPr lang="en-US" sz="800" dirty="0">
-                <a:solidFill>
-                  <a:srgbClr val="000000"/>
-                </a:solidFill>
-                <a:latin typeface="Arial" pitchFamily="34" charset="0"/>
-                <a:ea typeface="Arial" pitchFamily="34" charset="-122"/>
-                <a:cs typeface="Arial" pitchFamily="34" charset="-120"/>
-              </a:rPr>
-              <a:t> avg delay</a:t>
-            </a:r>
-            <a:endParaRPr lang="en-US" sz="800" dirty="0"/>
-          </a:p>
-        </p:txBody>
-      </p:sp>
-      <p:sp>
-        <p:nvSpPr>
           <p:cNvPr id="27" name="Text 22"/>
           <p:cNvSpPr/>
           <p:nvPr/>
@@ -8324,6 +8112,45 @@
                 <a:cs typeface="Arial" pitchFamily="34" charset="-120"/>
               </a:rPr>
               <a:t>☐   RTAT Strategy</a:t>
+            </a:r>
+            <a:endParaRPr lang="en-US" sz="1000" dirty="0"/>
+          </a:p>
+        </p:txBody>
+      </p:sp>
+      <p:sp>
+        <p:nvSpPr>
+          <p:cNvPr id="35" name="Text 30"/>
+          <p:cNvSpPr/>
+          <p:nvPr/>
+        </p:nvSpPr>
+        <p:spPr>
+          <a:xfrm>
+            <a:off x="6400800" y="4352544"/>
+            <a:ext cx="5303520" cy="210312"/>
+          </a:xfrm>
+          <a:prstGeom prst="rect">
+            <a:avLst/>
+          </a:prstGeom>
+          <a:noFill/>
+          <a:ln/>
+        </p:spPr>
+        <p:txBody>
+          <a:bodyPr wrap="square" rtlCol="0" anchor="ctr"/>
+          <a:lstStyle/>
+          <a:p>
+            <a:pPr indent="0" marL="0">
+              <a:buNone/>
+            </a:pPr>
+            <a:r>
+              <a:rPr lang="en-US" sz="1000" b="1" dirty="0">
+                <a:solidFill>
+                  <a:srgbClr val="000000"/>
+                </a:solidFill>
+                <a:latin typeface="Arial" pitchFamily="34" charset="0"/>
+                <a:ea typeface="Arial" pitchFamily="34" charset="-122"/>
+                <a:cs typeface="Arial" pitchFamily="34" charset="-120"/>
+              </a:rPr>
+              <a:t>☐   Pending Strategy</a:t>
             </a:r>
             <a:endParaRPr lang="en-US" sz="1000" dirty="0"/>
           </a:p>
@@ -8370,7 +8197,7 @@
       </p:sp>
       <p:sp>
         <p:nvSpPr>
-          <p:cNvPr id="29" name="Text 24"/>
+          <p:cNvPr id="28" name="Text 23"/>
           <p:cNvSpPr/>
           <p:nvPr/>
         </p:nvSpPr>
@@ -8393,9 +8220,9 @@
               <a:buNone/>
             </a:pPr>
             <a:r>
-              <a:rPr lang="en-US" sz="700" dirty="0">
+              <a:rPr lang="en-US" sz="800" b="1" dirty="0">
                 <a:solidFill>
-                  <a:srgbClr val="999999"/>
+                  <a:srgbClr val="000000"/>
                 </a:solidFill>
                 <a:latin typeface="Arial" pitchFamily="34" charset="0"/>
                 <a:ea typeface="Arial" pitchFamily="34" charset="-122"/>
@@ -8403,13 +8230,13 @@
               </a:rPr>
               <a:t>▪      Rank  |  Establish  |  Process  |  Amplify  |  Integrate  |  Redirect</a:t>
             </a:r>
-            <a:endParaRPr lang="en-US" sz="700" dirty="0"/>
+            <a:endParaRPr lang="en-US" sz="800" dirty="0"/>
           </a:p>
         </p:txBody>
       </p:sp>
       <p:sp>
         <p:nvSpPr>
-          <p:cNvPr id="30" name="Text 25"/>
+          <p:cNvPr id="28" name="Text 23"/>
           <p:cNvSpPr/>
           <p:nvPr/>
         </p:nvSpPr>
@@ -8440,7 +8267,7 @@
                 <a:ea typeface="Arial" pitchFamily="34" charset="-122"/>
                 <a:cs typeface="Arial" pitchFamily="34" charset="-120"/>
               </a:rPr>
-              <a:t>▪  10D target — once met, move to 8D</a:t>
+              <a:t>▪  Shifting to rural-heavy focus — Urban hit 9.7D (below 10D target)</a:t>
             </a:r>
             <a:endParaRPr lang="en-US" sz="800" dirty="0"/>
           </a:p>
@@ -8448,13 +8275,169 @@
       </p:sp>
       <p:sp>
         <p:nvSpPr>
-          <p:cNvPr id="31" name="Text 26"/>
+          <p:cNvPr id="28" name="Text 23"/>
           <p:cNvSpPr/>
           <p:nvPr/>
         </p:nvSpPr>
         <p:spPr>
           <a:xfrm>
             <a:off x="6583680" y="3529584"/>
+            <a:ext cx="5120640" cy="164592"/>
+          </a:xfrm>
+          <a:prstGeom prst="rect">
+            <a:avLst/>
+          </a:prstGeom>
+          <a:noFill/>
+          <a:ln/>
+        </p:spPr>
+        <p:txBody>
+          <a:bodyPr wrap="square" rtlCol="0" anchor="ctr"/>
+          <a:lstStyle/>
+          <a:p>
+            <a:pPr indent="0" marL="0">
+              <a:buNone/>
+            </a:pPr>
+            <a:r>
+              <a:rPr lang="en-US" sz="800" b="1" dirty="0">
+                <a:solidFill>
+                  <a:srgbClr val="000000"/>
+                </a:solidFill>
+                <a:latin typeface="Arial" pitchFamily="34" charset="0"/>
+                <a:ea typeface="Arial" pitchFamily="34" charset="-122"/>
+                <a:cs typeface="Arial" pitchFamily="34" charset="-120"/>
+              </a:rPr>
+              <a:t>▪  Continue holding Urban below 10D while driving Rural to 10D</a:t>
+            </a:r>
+            <a:endParaRPr lang="en-US" sz="800" dirty="0"/>
+          </a:p>
+        </p:txBody>
+      </p:sp>
+      <p:sp>
+        <p:nvSpPr>
+          <p:cNvPr id="28" name="Text 23"/>
+          <p:cNvSpPr/>
+          <p:nvPr/>
+        </p:nvSpPr>
+        <p:spPr>
+          <a:xfrm>
+            <a:off x="6583680" y="3712464"/>
+            <a:ext cx="5120640" cy="164592"/>
+          </a:xfrm>
+          <a:prstGeom prst="rect">
+            <a:avLst/>
+          </a:prstGeom>
+          <a:noFill/>
+          <a:ln/>
+        </p:spPr>
+        <p:txBody>
+          <a:bodyPr wrap="square" rtlCol="0" anchor="ctr"/>
+          <a:lstStyle/>
+          <a:p>
+            <a:pPr indent="0" marL="0">
+              <a:buNone/>
+            </a:pPr>
+            <a:r>
+              <a:rPr lang="en-US" sz="800" b="1" dirty="0">
+                <a:solidFill>
+                  <a:srgbClr val="000000"/>
+                </a:solidFill>
+                <a:latin typeface="Arial" pitchFamily="34" charset="0"/>
+                <a:ea typeface="Arial" pitchFamily="34" charset="-122"/>
+                <a:cs typeface="Arial" pitchFamily="34" charset="-120"/>
+              </a:rPr>
+              <a:t>▪  Once 10D met across both markets, target moves to 8D before peak season</a:t>
+            </a:r>
+            <a:endParaRPr lang="en-US" sz="800" dirty="0"/>
+          </a:p>
+        </p:txBody>
+      </p:sp>
+      <p:sp>
+        <p:nvSpPr>
+          <p:cNvPr id="28" name="Text 23"/>
+          <p:cNvSpPr/>
+          <p:nvPr/>
+        </p:nvSpPr>
+        <p:spPr>
+          <a:xfrm>
+            <a:off x="6583680" y="3895344"/>
+            <a:ext cx="5120640" cy="164592"/>
+          </a:xfrm>
+          <a:prstGeom prst="rect">
+            <a:avLst/>
+          </a:prstGeom>
+          <a:noFill/>
+          <a:ln/>
+        </p:spPr>
+        <p:txBody>
+          <a:bodyPr wrap="square" rtlCol="0" anchor="ctr"/>
+          <a:lstStyle/>
+          <a:p>
+            <a:pPr indent="0" marL="0">
+              <a:buNone/>
+            </a:pPr>
+            <a:r>
+              <a:rPr lang="en-US" sz="800" b="1" dirty="0">
+                <a:solidFill>
+                  <a:srgbClr val="000000"/>
+                </a:solidFill>
+                <a:latin typeface="Arial" pitchFamily="34" charset="0"/>
+                <a:ea typeface="Arial" pitchFamily="34" charset="-122"/>
+                <a:cs typeface="Arial" pitchFamily="34" charset="-120"/>
+              </a:rPr>
+              <a:t>▪  Dynamic Top 10: rank ASCs by volume × RTAT gap, apply REPAIR,</a:t>
+            </a:r>
+            <a:endParaRPr lang="en-US" sz="800" dirty="0"/>
+          </a:p>
+        </p:txBody>
+      </p:sp>
+      <p:sp>
+        <p:nvSpPr>
+          <p:cNvPr id="28" name="Text 23"/>
+          <p:cNvSpPr/>
+          <p:nvPr/>
+        </p:nvSpPr>
+        <p:spPr>
+          <a:xfrm>
+            <a:off x="6583680" y="4078224"/>
+            <a:ext cx="5120640" cy="164592"/>
+          </a:xfrm>
+          <a:prstGeom prst="rect">
+            <a:avLst/>
+          </a:prstGeom>
+          <a:noFill/>
+          <a:ln/>
+        </p:spPr>
+        <p:txBody>
+          <a:bodyPr wrap="square" rtlCol="0" anchor="ctr"/>
+          <a:lstStyle/>
+          <a:p>
+            <a:pPr indent="0" marL="0">
+              <a:buNone/>
+            </a:pPr>
+            <a:r>
+              <a:rPr lang="en-US" sz="800" b="1" dirty="0">
+                <a:solidFill>
+                  <a:srgbClr val="000000"/>
+                </a:solidFill>
+                <a:latin typeface="Arial" pitchFamily="34" charset="0"/>
+                <a:ea typeface="Arial" pitchFamily="34" charset="-122"/>
+                <a:cs typeface="Arial" pitchFamily="34" charset="-120"/>
+              </a:rPr>
+              <a:t>▪  cycle list as accounts stabilize and new ones surface</a:t>
+            </a:r>
+            <a:endParaRPr lang="en-US" sz="800" dirty="0"/>
+          </a:p>
+        </p:txBody>
+      </p:sp>
+      <p:sp>
+        <p:nvSpPr>
+          <p:cNvPr id="23" name="Text 18"/>
+          <p:cNvSpPr/>
+          <p:nvPr/>
+        </p:nvSpPr>
+        <p:spPr>
+          <a:xfrm>
+            <a:off x="640080" y="4928616"/>
             <a:ext cx="5120640" cy="164592"/>
           </a:xfrm>
           <a:prstGeom prst="rect">
@@ -8479,7 +8462,7 @@
                 <a:ea typeface="Arial" pitchFamily="34" charset="-122"/>
                 <a:cs typeface="Arial" pitchFamily="34" charset="-120"/>
               </a:rPr>
-              <a:t>▪  Selecting new focus ASCs for handed-off accounts</a:t>
+              <a:t>▪  Started at ~16% of pending at 30+ days when we took over</a:t>
             </a:r>
             <a:endParaRPr lang="en-US" sz="800" dirty="0"/>
           </a:p>
@@ -8487,13 +8470,13 @@
       </p:sp>
       <p:sp>
         <p:nvSpPr>
-          <p:cNvPr id="32" name="Text 27"/>
+          <p:cNvPr id="23" name="Text 18"/>
           <p:cNvSpPr/>
           <p:nvPr/>
         </p:nvSpPr>
         <p:spPr>
           <a:xfrm>
-            <a:off x="6583680" y="3712464"/>
+            <a:off x="640080" y="5111496"/>
             <a:ext cx="5120640" cy="164592"/>
           </a:xfrm>
           <a:prstGeom prst="rect">
@@ -8518,63 +8501,7 @@
                 <a:ea typeface="Arial" pitchFamily="34" charset="-122"/>
                 <a:cs typeface="Arial" pitchFamily="34" charset="-120"/>
               </a:rPr>
-              <a:t>▪  </a:t>
-            </a:r>
-            <a:pPr indent="0" marL="0">
-              <a:buNone/>
-            </a:pPr>
-            <a:r>
-              <a:rPr lang="en-US" sz="800" dirty="0">
-                <a:solidFill>
-                  <a:srgbClr val="000000"/>
-                </a:solidFill>
-                <a:latin typeface="Arial" pitchFamily="34" charset="0"/>
-                <a:ea typeface="Arial" pitchFamily="34" charset="-122"/>
-                <a:cs typeface="Arial" pitchFamily="34" charset="-120"/>
-              </a:rPr>
-              <a:t>Engage: Doctor Maint </a:t>
-            </a:r>
-            <a:pPr indent="0" marL="0">
-              <a:buNone/>
-            </a:pPr>
-            <a:r>
-              <a:rPr lang="en-US" sz="800" b="1" dirty="0">
-                <a:solidFill>
-                  <a:srgbClr val="CC0000"/>
-                </a:solidFill>
-                <a:latin typeface="Arial" pitchFamily="34" charset="0"/>
-                <a:ea typeface="Arial" pitchFamily="34" charset="-122"/>
-                <a:cs typeface="Arial" pitchFamily="34" charset="-120"/>
-              </a:rPr>
-              <a:t>(37.0D)</a:t>
-            </a:r>
-            <a:pPr indent="0" marL="0">
-              <a:buNone/>
-            </a:pPr>
-            <a:r>
-              <a:rPr lang="en-US" sz="800" dirty="0">
-                <a:solidFill>
-                  <a:srgbClr val="000000"/>
-                </a:solidFill>
-                <a:latin typeface="Arial" pitchFamily="34" charset="0"/>
-                <a:ea typeface="Arial" pitchFamily="34" charset="-122"/>
-                <a:cs typeface="Arial" pitchFamily="34" charset="-120"/>
-              </a:rPr>
-              <a:t>, Keisers </a:t>
-            </a:r>
-            <a:pPr indent="0" marL="0">
-              <a:buNone/>
-            </a:pPr>
-            <a:r>
-              <a:rPr lang="en-US" sz="800" b="1" dirty="0">
-                <a:solidFill>
-                  <a:srgbClr val="CC0000"/>
-                </a:solidFill>
-                <a:latin typeface="Arial" pitchFamily="34" charset="0"/>
-                <a:ea typeface="Arial" pitchFamily="34" charset="-122"/>
-                <a:cs typeface="Arial" pitchFamily="34" charset="-120"/>
-              </a:rPr>
-              <a:t>(30.9D)</a:t>
+              <a:t>▪  Now at ~9.4% combined (Graham 7.6%, Brown 11.4%)</a:t>
             </a:r>
             <a:endParaRPr lang="en-US" sz="800" dirty="0"/>
           </a:p>
@@ -8582,13 +8509,13 @@
       </p:sp>
       <p:sp>
         <p:nvSpPr>
-          <p:cNvPr id="33" name="Text 28"/>
+          <p:cNvPr id="23" name="Text 18"/>
           <p:cNvSpPr/>
           <p:nvPr/>
         </p:nvSpPr>
         <p:spPr>
           <a:xfrm>
-            <a:off x="6583680" y="3895344"/>
+            <a:off x="640080" y="5294376"/>
             <a:ext cx="5120640" cy="164592"/>
           </a:xfrm>
           <a:prstGeom prst="rect">
@@ -8613,7 +8540,7 @@
                 <a:ea typeface="Arial" pitchFamily="34" charset="-122"/>
                 <a:cs typeface="Arial" pitchFamily="34" charset="-120"/>
               </a:rPr>
-              <a:t>▪  Urban: hold 10D, push to 8D by Q3</a:t>
+              <a:t>▪  Total pending: 1,888 → 1,570 (W8→W12)</a:t>
             </a:r>
             <a:endParaRPr lang="en-US" sz="800" dirty="0"/>
           </a:p>
@@ -8621,13 +8548,13 @@
       </p:sp>
       <p:sp>
         <p:nvSpPr>
-          <p:cNvPr id="34" name="Text 29"/>
+          <p:cNvPr id="23" name="Text 18"/>
           <p:cNvSpPr/>
           <p:nvPr/>
         </p:nvSpPr>
         <p:spPr>
           <a:xfrm>
-            <a:off x="6583680" y="4078224"/>
+            <a:off x="640080" y="5477256"/>
             <a:ext cx="5120640" cy="164592"/>
           </a:xfrm>
           <a:prstGeom prst="rect">
@@ -8652,7 +8579,7 @@
                 <a:ea typeface="Arial" pitchFamily="34" charset="-122"/>
                 <a:cs typeface="Arial" pitchFamily="34" charset="-120"/>
               </a:rPr>
-              <a:t>▪  Rural: 11D by Q2, 10D by Q3</a:t>
+              <a:t>▪  Avg pending age: 12.9D combined, trending down</a:t>
             </a:r>
             <a:endParaRPr lang="en-US" sz="800" dirty="0"/>
           </a:p>
@@ -8660,14 +8587,14 @@
       </p:sp>
       <p:sp>
         <p:nvSpPr>
-          <p:cNvPr id="35" name="Text 30"/>
+          <p:cNvPr id="23" name="Text 18"/>
           <p:cNvSpPr/>
           <p:nvPr/>
         </p:nvSpPr>
         <p:spPr>
           <a:xfrm>
-            <a:off x="6400800" y="4352544"/>
-            <a:ext cx="5303520" cy="210312"/>
+            <a:off x="640080" y="5660136"/>
+            <a:ext cx="5120640" cy="164592"/>
           </a:xfrm>
           <a:prstGeom prst="rect">
             <a:avLst/>
@@ -8683,7 +8610,7 @@
               <a:buNone/>
             </a:pPr>
             <a:r>
-              <a:rPr lang="en-US" sz="1000" b="1" dirty="0">
+              <a:rPr lang="en-US" sz="800" dirty="0">
                 <a:solidFill>
                   <a:srgbClr val="000000"/>
                 </a:solidFill>
@@ -8691,9 +8618,9 @@
                 <a:ea typeface="Arial" pitchFamily="34" charset="-122"/>
                 <a:cs typeface="Arial" pitchFamily="34" charset="-120"/>
               </a:rPr>
-              <a:t>☐   Pending Strategy</a:t>
+              <a:t>▪  60+ day pending: 20 total — pushing toward zero</a:t>
             </a:r>
-            <a:endParaRPr lang="en-US" sz="1000" dirty="0"/>
+            <a:endParaRPr lang="en-US" sz="800" dirty="0"/>
           </a:p>
         </p:txBody>
       </p:sp>
@@ -8730,57 +8657,24 @@
                 <a:ea typeface="Arial" pitchFamily="34" charset="-122"/>
                 <a:cs typeface="Arial" pitchFamily="34" charset="-120"/>
               </a:rPr>
-              <a:t>▪  </a:t>
+              <a:t>▪  Pending managed holistically — not split by Urban/Rural</a:t>
             </a:r>
             <a:pPr indent="0" marL="0">
               <a:buNone/>
             </a:pPr>
-            <a:r>
-              <a:rPr lang="en-US" sz="800" dirty="0">
-                <a:solidFill>
-                  <a:srgbClr val="000000"/>
-                </a:solidFill>
-                <a:latin typeface="Arial" pitchFamily="34" charset="0"/>
-                <a:ea typeface="Arial" pitchFamily="34" charset="-122"/>
-                <a:cs typeface="Arial" pitchFamily="34" charset="-120"/>
-              </a:rPr>
-              <a:t>Appliance Medic </a:t>
-            </a:r>
             <a:pPr indent="0" marL="0">
               <a:buNone/>
             </a:pPr>
-            <a:r>
-              <a:rPr lang="en-US" sz="800" b="1" dirty="0">
-                <a:solidFill>
-                  <a:srgbClr val="CC0000"/>
-                </a:solidFill>
-                <a:latin typeface="Arial" pitchFamily="34" charset="0"/>
-                <a:ea typeface="Arial" pitchFamily="34" charset="-122"/>
-                <a:cs typeface="Arial" pitchFamily="34" charset="-120"/>
-              </a:rPr>
-              <a:t>59.8D</a:t>
-            </a:r>
             <a:pPr indent="0" marL="0">
               <a:buNone/>
             </a:pPr>
-            <a:r>
-              <a:rPr lang="en-US" sz="800" dirty="0">
-                <a:solidFill>
-                  <a:srgbClr val="000000"/>
-                </a:solidFill>
-                <a:latin typeface="Arial" pitchFamily="34" charset="0"/>
-                <a:ea typeface="Arial" pitchFamily="34" charset="-122"/>
-                <a:cs typeface="Arial" pitchFamily="34" charset="-120"/>
-              </a:rPr>
-              <a:t> — immediate escalation</a:t>
-            </a:r>
             <a:endParaRPr lang="en-US" sz="800" dirty="0"/>
           </a:p>
         </p:txBody>
       </p:sp>
       <p:sp>
         <p:nvSpPr>
-          <p:cNvPr id="37" name="Text 32"/>
+          <p:cNvPr id="36" name="Text 31"/>
           <p:cNvSpPr/>
           <p:nvPr/>
         </p:nvSpPr>
@@ -8811,15 +8705,24 @@
                 <a:ea typeface="Arial" pitchFamily="34" charset="-122"/>
                 <a:cs typeface="Arial" pitchFamily="34" charset="-120"/>
               </a:rPr>
-              <a:t>▪  A-OK: 16 pending — accelerate scheduling</a:t>
+              <a:t>▪  30+ day pending: ~16% → now ~9.4% (goal: 7%)</a:t>
             </a:r>
+            <a:pPr indent="0" marL="0">
+              <a:buNone/>
+            </a:pPr>
+            <a:pPr indent="0" marL="0">
+              <a:buNone/>
+            </a:pPr>
+            <a:pPr indent="0" marL="0">
+              <a:buNone/>
+            </a:pPr>
             <a:endParaRPr lang="en-US" sz="800" dirty="0"/>
           </a:p>
         </p:txBody>
       </p:sp>
       <p:sp>
         <p:nvSpPr>
-          <p:cNvPr id="38" name="Text 33"/>
+          <p:cNvPr id="36" name="Text 31"/>
           <p:cNvSpPr/>
           <p:nvPr/>
         </p:nvSpPr>
@@ -8850,8 +8753,209 @@
                 <a:ea typeface="Arial" pitchFamily="34" charset="-122"/>
                 <a:cs typeface="Arial" pitchFamily="34" charset="-120"/>
               </a:rPr>
-              <a:t>▪  Target: top-10 avg delay below 10D</a:t>
+              <a:t>▪  Push 30+ toward zero — remaining = backorder parts only</a:t>
             </a:r>
+            <a:pPr indent="0" marL="0">
+              <a:buNone/>
+            </a:pPr>
+            <a:pPr indent="0" marL="0">
+              <a:buNone/>
+            </a:pPr>
+            <a:pPr indent="0" marL="0">
+              <a:buNone/>
+            </a:pPr>
+            <a:endParaRPr lang="en-US" sz="800" dirty="0"/>
+          </a:p>
+        </p:txBody>
+      </p:sp>
+      <p:sp>
+        <p:nvSpPr>
+          <p:cNvPr id="36" name="Text 31"/>
+          <p:cNvSpPr/>
+          <p:nvPr/>
+        </p:nvSpPr>
+        <p:spPr>
+          <a:xfrm>
+            <a:off x="6583680" y="5138928"/>
+            <a:ext cx="5120640" cy="164592"/>
+          </a:xfrm>
+          <a:prstGeom prst="rect">
+            <a:avLst/>
+          </a:prstGeom>
+          <a:noFill/>
+          <a:ln/>
+        </p:spPr>
+        <p:txBody>
+          <a:bodyPr wrap="square" rtlCol="0" anchor="ctr"/>
+          <a:lstStyle/>
+          <a:p>
+            <a:pPr indent="0" marL="0">
+              <a:buNone/>
+            </a:pPr>
+            <a:r>
+              <a:rPr lang="en-US" sz="800" dirty="0">
+                <a:solidFill>
+                  <a:srgbClr val="000000"/>
+                </a:solidFill>
+                <a:latin typeface="Arial" pitchFamily="34" charset="0"/>
+                <a:ea typeface="Arial" pitchFamily="34" charset="-122"/>
+                <a:cs typeface="Arial" pitchFamily="34" charset="-120"/>
+              </a:rPr>
+              <a:t>▪  Once 30+ controlled, shift focus to 25-30 day bucket</a:t>
+            </a:r>
+            <a:pPr indent="0" marL="0">
+              <a:buNone/>
+            </a:pPr>
+            <a:pPr indent="0" marL="0">
+              <a:buNone/>
+            </a:pPr>
+            <a:pPr indent="0" marL="0">
+              <a:buNone/>
+            </a:pPr>
+            <a:endParaRPr lang="en-US" sz="800" dirty="0"/>
+          </a:p>
+        </p:txBody>
+      </p:sp>
+      <p:sp>
+        <p:nvSpPr>
+          <p:cNvPr id="36" name="Text 31"/>
+          <p:cNvSpPr/>
+          <p:nvPr/>
+        </p:nvSpPr>
+        <p:spPr>
+          <a:xfrm>
+            <a:off x="6583680" y="5321808"/>
+            <a:ext cx="5120640" cy="164592"/>
+          </a:xfrm>
+          <a:prstGeom prst="rect">
+            <a:avLst/>
+          </a:prstGeom>
+          <a:noFill/>
+          <a:ln/>
+        </p:spPr>
+        <p:txBody>
+          <a:bodyPr wrap="square" rtlCol="0" anchor="ctr"/>
+          <a:lstStyle/>
+          <a:p>
+            <a:pPr indent="0" marL="0">
+              <a:buNone/>
+            </a:pPr>
+            <a:r>
+              <a:rPr lang="en-US" sz="800" dirty="0">
+                <a:solidFill>
+                  <a:srgbClr val="000000"/>
+                </a:solidFill>
+                <a:latin typeface="Arial" pitchFamily="34" charset="0"/>
+                <a:ea typeface="Arial" pitchFamily="34" charset="-122"/>
+                <a:cs typeface="Arial" pitchFamily="34" charset="-120"/>
+              </a:rPr>
+              <a:t>▪  Daily tracking via dashboard linked to Google Sheets</a:t>
+            </a:r>
+            <a:pPr indent="0" marL="0">
+              <a:buNone/>
+            </a:pPr>
+            <a:pPr indent="0" marL="0">
+              <a:buNone/>
+            </a:pPr>
+            <a:pPr indent="0" marL="0">
+              <a:buNone/>
+            </a:pPr>
+            <a:endParaRPr lang="en-US" sz="800" dirty="0"/>
+          </a:p>
+        </p:txBody>
+      </p:sp>
+      <p:sp>
+        <p:nvSpPr>
+          <p:cNvPr id="36" name="Text 31"/>
+          <p:cNvSpPr/>
+          <p:nvPr/>
+        </p:nvSpPr>
+        <p:spPr>
+          <a:xfrm>
+            <a:off x="6583680" y="5504688"/>
+            <a:ext cx="5120640" cy="164592"/>
+          </a:xfrm>
+          <a:prstGeom prst="rect">
+            <a:avLst/>
+          </a:prstGeom>
+          <a:noFill/>
+          <a:ln/>
+        </p:spPr>
+        <p:txBody>
+          <a:bodyPr wrap="square" rtlCol="0" anchor="ctr"/>
+          <a:lstStyle/>
+          <a:p>
+            <a:pPr indent="0" marL="0">
+              <a:buNone/>
+            </a:pPr>
+            <a:r>
+              <a:rPr lang="en-US" sz="800" dirty="0">
+                <a:solidFill>
+                  <a:srgbClr val="000000"/>
+                </a:solidFill>
+                <a:latin typeface="Arial" pitchFamily="34" charset="0"/>
+                <a:ea typeface="Arial" pitchFamily="34" charset="-122"/>
+                <a:cs typeface="Arial" pitchFamily="34" charset="-120"/>
+              </a:rPr>
+              <a:t>▪  Avg pending days tracked WoW — target continuous reduction</a:t>
+            </a:r>
+            <a:pPr indent="0" marL="0">
+              <a:buNone/>
+            </a:pPr>
+            <a:pPr indent="0" marL="0">
+              <a:buNone/>
+            </a:pPr>
+            <a:pPr indent="0" marL="0">
+              <a:buNone/>
+            </a:pPr>
+            <a:endParaRPr lang="en-US" sz="800" dirty="0"/>
+          </a:p>
+        </p:txBody>
+      </p:sp>
+      <p:sp>
+        <p:nvSpPr>
+          <p:cNvPr id="36" name="Text 31"/>
+          <p:cNvSpPr/>
+          <p:nvPr/>
+        </p:nvSpPr>
+        <p:spPr>
+          <a:xfrm>
+            <a:off x="6583680" y="5687568"/>
+            <a:ext cx="5120640" cy="164592"/>
+          </a:xfrm>
+          <a:prstGeom prst="rect">
+            <a:avLst/>
+          </a:prstGeom>
+          <a:noFill/>
+          <a:ln/>
+        </p:spPr>
+        <p:txBody>
+          <a:bodyPr wrap="square" rtlCol="0" anchor="ctr"/>
+          <a:lstStyle/>
+          <a:p>
+            <a:pPr indent="0" marL="0">
+              <a:buNone/>
+            </a:pPr>
+            <a:r>
+              <a:rPr lang="en-US" sz="800" dirty="0">
+                <a:solidFill>
+                  <a:srgbClr val="000000"/>
+                </a:solidFill>
+                <a:latin typeface="Arial" pitchFamily="34" charset="0"/>
+                <a:ea typeface="Arial" pitchFamily="34" charset="-122"/>
+                <a:cs typeface="Arial" pitchFamily="34" charset="-120"/>
+              </a:rPr>
+              <a:t>▪  Top 10 ASC avg pending age target: below 10 days</a:t>
+            </a:r>
+            <a:pPr indent="0" marL="0">
+              <a:buNone/>
+            </a:pPr>
+            <a:pPr indent="0" marL="0">
+              <a:buNone/>
+            </a:pPr>
+            <a:pPr indent="0" marL="0">
+              <a:buNone/>
+            </a:pPr>
             <a:endParaRPr lang="en-US" sz="800" dirty="0"/>
           </a:p>
         </p:txBody>
